--- a/doc/공모전/쉼마루_서비스소개서_v5.pptx
+++ b/doc/공모전/쉼마루_서비스소개서_v5.pptx
@@ -3869,7 +3869,7 @@
                             <a:srgbClr val="000000"/>
                           </a:solidFill>
                         </a:rPr>
-                        <a:t>한국관광공사 국문 관광정보 서비스 (KorService2) — 키워드 검색·행사정보 조회</a:t>
+                        <a:t>한국관광공사 국문 관광정보 서비스 (KorService2) — 키워드 검색 조회</a:t>
                       </a:r>
                     </a:p>
                   </a:txBody>
@@ -4017,7 +4017,7 @@
                             <a:srgbClr val="000000"/>
                           </a:solidFill>
                         </a:rPr>
-                        <a:t>서원·고택·탈춤·가야·신라 등 경북 특화 키워드로 전통문화 자원을 검색하고, 여행 기간에 열리는 경북 축제·행사를 코스에 자동 포함</a:t>
+                        <a:t>서원·고택·탈춤·가야·신라 등 경북 특화 키워드로 전통문화 자원을 검색해 탐색 결과와 코스 후보를 구성</a:t>
                       </a:r>
                     </a:p>
                   </a:txBody>
@@ -4219,7 +4219,7 @@
                             <a:srgbClr val="000000"/>
                           </a:solidFill>
                         </a:rPr>
-                        <a:t>한국관광공사 국문 관광정보 서비스 (KorService2) — 공통·소개·반복·이미지 정보 조회</a:t>
+                        <a:t>한국관광공사 국문 관광정보 서비스 (KorService2) — 공통·소개·이미지 정보 조회</a:t>
                       </a:r>
                     </a:p>
                   </a:txBody>
@@ -7728,7 +7728,7 @@
                             <a:srgbClr val="000000"/>
                           </a:solidFill>
                         </a:rPr>
-                        <a:t>한국관광공사 반려동물 동반여행 서비스 (KorPetTourService)</a:t>
+                        <a:t>한국관광공사 반려동물 동반여행 서비스 (KorPetTourService2)</a:t>
                       </a:r>
                     </a:p>
                   </a:txBody>
@@ -8078,7 +8078,7 @@
                             <a:srgbClr val="000000"/>
                           </a:solidFill>
                         </a:rPr>
-                        <a:t>한국관광공사 관광지 연관 추천 정보 서비스 (TarRlteService · 관광 빅데이터)</a:t>
+                        <a:t>한국관광공사 관광지 연관 추천 정보 서비스 (TarRlteTarService1 · 관광 빅데이터)</a:t>
                       </a:r>
                     </a:p>
                   </a:txBody>

--- a/doc/공모전/쉼마루_서비스소개서_v5.pptx
+++ b/doc/공모전/쉼마루_서비스소개서_v5.pptx
@@ -2759,7 +2759,7 @@
                             <a:srgbClr val="000000"/>
                           </a:solidFill>
                         </a:rPr>
-                        <a:t>3. 인사이트 화면에서 시군별 방문 통계를 확인한다.</a:t>
+                        <a:t>3. ‘지금 경북’에서 시군별 방문 통계를 확인한다.</a:t>
                       </a:r>
                     </a:p>
                   </a:txBody>
@@ -3157,7 +3157,7 @@
                             <a:srgbClr val="000000"/>
                           </a:solidFill>
                         </a:rPr>
-                        <a:t>관광 데이터랩의 시군별 방문자 통계로 한적지수를 계산해 방문이 적은 내륙 시군의 전통문화 자원을 우선 추천하고, 시군별 방문 통계를 인사이트 화면으로 보여 주는 기능입니다.</a:t>
+                        <a:t>관광 데이터랩의 시군별 방문자 통계로 한적지수를 계산해 방문이 적은 내륙 시군의 전통문화 자원을 우선 추천하고, 시군별 방문 통계와 이번 주말 한적한 시군을 ‘지금 경북’ 화면으로 보여 주는 기능입니다.</a:t>
                       </a:r>
                     </a:p>
                   </a:txBody>
@@ -8680,7 +8680,7 @@
                             <a:srgbClr val="000000"/>
                           </a:solidFill>
                         </a:rPr>
-                        <a:t>경북 시군별 방문자 통계로 ‘한적지수’를 계산해 방문이 적은 시군에 추천 가중치를 부여하고, 인사이트 화면의 시군별 랭킹을 구성</a:t>
+                        <a:t>경북 시군별 방문자 통계로 ‘한적지수’를 계산해 방문이 적은 시군에 추천 가중치를 부여하고, ‘지금 경북’ 화면의 시군별 랭킹을 구성</a:t>
                       </a:r>
                     </a:p>
                   </a:txBody>
@@ -10005,7 +10005,7 @@
                             <a:srgbClr val="000000"/>
                           </a:solidFill>
                         </a:rPr>
-                        <a:t>5. 숨은 경북 발견 — 시군별 방문자 통계로 계산한 한적지수로 봉화·청송·영양 등 덜 알려진 지역을 우선 추천하고 데이터 인사이트 제공</a:t>
+                        <a:t>5. 숨은 경북 발견 — 시군별 방문자 통계로 계산한 한적지수로 봉화·청송·영양 등 덜 알려진 지역을 우선 추천하고, ‘지금 경북’ 화면에서 시군별 방문 통계 제공</a:t>
                       </a:r>
                     </a:p>
                     <a:p>
